--- a/Fantasy Draft Helper.pptx
+++ b/Fantasy Draft Helper.pptx
@@ -14503,7 +14503,7 @@
           <a:p>
             <a:fld id="{FE1BE3E2-FE18-4AEF-B931-77DE0B8EB6CD}" type="datetimeFigureOut">
               <a:rPr lang="en-US" smtClean="0"/>
-              <a:t>10/16/2026</a:t>
+              <a:t>10/21/2026</a:t>
             </a:fld>
             <a:endParaRPr lang="en-US"/>
           </a:p>
@@ -15001,7 +15001,7 @@
           <a:p>
             <a:fld id="{0F5DFF1B-130D-46D1-86F3-3345754F464F}" type="datetimeFigureOut">
               <a:rPr lang="en-US" smtClean="0"/>
-              <a:t>10/16/2026</a:t>
+              <a:t>10/21/2026</a:t>
             </a:fld>
             <a:endParaRPr lang="en-US"/>
           </a:p>
@@ -15199,7 +15199,7 @@
           <a:p>
             <a:fld id="{0F5DFF1B-130D-46D1-86F3-3345754F464F}" type="datetimeFigureOut">
               <a:rPr lang="en-US" smtClean="0"/>
-              <a:t>10/16/2026</a:t>
+              <a:t>10/21/2026</a:t>
             </a:fld>
             <a:endParaRPr lang="en-US"/>
           </a:p>
@@ -15407,7 +15407,7 @@
           <a:p>
             <a:fld id="{0F5DFF1B-130D-46D1-86F3-3345754F464F}" type="datetimeFigureOut">
               <a:rPr lang="en-US" smtClean="0"/>
-              <a:t>10/16/2026</a:t>
+              <a:t>10/21/2026</a:t>
             </a:fld>
             <a:endParaRPr lang="en-US"/>
           </a:p>
@@ -15605,7 +15605,7 @@
           <a:p>
             <a:fld id="{0F5DFF1B-130D-46D1-86F3-3345754F464F}" type="datetimeFigureOut">
               <a:rPr lang="en-US" smtClean="0"/>
-              <a:t>10/16/2026</a:t>
+              <a:t>10/21/2026</a:t>
             </a:fld>
             <a:endParaRPr lang="en-US"/>
           </a:p>
@@ -15880,7 +15880,7 @@
           <a:p>
             <a:fld id="{0F5DFF1B-130D-46D1-86F3-3345754F464F}" type="datetimeFigureOut">
               <a:rPr lang="en-US" smtClean="0"/>
-              <a:t>10/16/2026</a:t>
+              <a:t>10/21/2026</a:t>
             </a:fld>
             <a:endParaRPr lang="en-US"/>
           </a:p>
@@ -16145,7 +16145,7 @@
           <a:p>
             <a:fld id="{0F5DFF1B-130D-46D1-86F3-3345754F464F}" type="datetimeFigureOut">
               <a:rPr lang="en-US" smtClean="0"/>
-              <a:t>10/16/2026</a:t>
+              <a:t>10/21/2026</a:t>
             </a:fld>
             <a:endParaRPr lang="en-US"/>
           </a:p>
@@ -16557,7 +16557,7 @@
           <a:p>
             <a:fld id="{0F5DFF1B-130D-46D1-86F3-3345754F464F}" type="datetimeFigureOut">
               <a:rPr lang="en-US" smtClean="0"/>
-              <a:t>10/16/2026</a:t>
+              <a:t>10/21/2026</a:t>
             </a:fld>
             <a:endParaRPr lang="en-US"/>
           </a:p>
@@ -16698,7 +16698,7 @@
           <a:p>
             <a:fld id="{0F5DFF1B-130D-46D1-86F3-3345754F464F}" type="datetimeFigureOut">
               <a:rPr lang="en-US" smtClean="0"/>
-              <a:t>10/16/2026</a:t>
+              <a:t>10/21/2026</a:t>
             </a:fld>
             <a:endParaRPr lang="en-US"/>
           </a:p>
@@ -16811,7 +16811,7 @@
           <a:p>
             <a:fld id="{0F5DFF1B-130D-46D1-86F3-3345754F464F}" type="datetimeFigureOut">
               <a:rPr lang="en-US" smtClean="0"/>
-              <a:t>10/16/2026</a:t>
+              <a:t>10/21/2026</a:t>
             </a:fld>
             <a:endParaRPr lang="en-US"/>
           </a:p>
@@ -17122,7 +17122,7 @@
           <a:p>
             <a:fld id="{0F5DFF1B-130D-46D1-86F3-3345754F464F}" type="datetimeFigureOut">
               <a:rPr lang="en-US" smtClean="0"/>
-              <a:t>10/16/2026</a:t>
+              <a:t>10/21/2026</a:t>
             </a:fld>
             <a:endParaRPr lang="en-US"/>
           </a:p>
@@ -17410,7 +17410,7 @@
           <a:p>
             <a:fld id="{0F5DFF1B-130D-46D1-86F3-3345754F464F}" type="datetimeFigureOut">
               <a:rPr lang="en-US" smtClean="0"/>
-              <a:t>10/16/2026</a:t>
+              <a:t>10/21/2026</a:t>
             </a:fld>
             <a:endParaRPr lang="en-US"/>
           </a:p>
@@ -17651,7 +17651,7 @@
           <a:p>
             <a:fld id="{0F5DFF1B-130D-46D1-86F3-3345754F464F}" type="datetimeFigureOut">
               <a:rPr lang="en-US" smtClean="0"/>
-              <a:t>10/16/2026</a:t>
+              <a:t>10/21/2026</a:t>
             </a:fld>
             <a:endParaRPr lang="en-US"/>
           </a:p>
@@ -19141,6 +19141,14 @@
 <file path=ppt/slides/slide5.xml><?xml version="1.0" encoding="utf-8"?>
 <p:sld xmlns:a="http://schemas.openxmlformats.org/drawingml/2006/main" xmlns:r="http://schemas.openxmlformats.org/officeDocument/2006/relationships" xmlns:p="http://schemas.openxmlformats.org/presentationml/2006/main">
   <p:cSld>
+    <p:bg>
+      <p:bgPr>
+        <a:solidFill>
+          <a:schemeClr val="bg1"/>
+        </a:solidFill>
+        <a:effectLst/>
+      </p:bgPr>
+    </p:bg>
     <p:spTree>
       <p:nvGrpSpPr>
         <p:cNvPr id="1" name=""/>
@@ -19155,59 +19163,386 @@
           <a:chExt cx="0" cy="0"/>
         </a:xfrm>
       </p:grpSpPr>
+      <p:pic>
+        <p:nvPicPr>
+          <p:cNvPr id="9" name="Picture 8">
+            <a:extLst>
+              <a:ext uri="{FF2B5EF4-FFF2-40B4-BE49-F238E27FC236}">
+                <a16:creationId xmlns:a16="http://schemas.microsoft.com/office/drawing/2014/main" id="{B9411B6F-9C62-DD75-5C03-53282A49E985}"/>
+              </a:ext>
+            </a:extLst>
+          </p:cNvPr>
+          <p:cNvPicPr>
+            <a:picLocks noChangeAspect="1"/>
+          </p:cNvPicPr>
+          <p:nvPr/>
+        </p:nvPicPr>
+        <p:blipFill>
+          <a:blip r:embed="rId2"/>
+          <a:stretch>
+            <a:fillRect/>
+          </a:stretch>
+        </p:blipFill>
+        <p:spPr>
+          <a:xfrm>
+            <a:off x="225070" y="3879853"/>
+            <a:ext cx="3400481" cy="2507853"/>
+          </a:xfrm>
+          <a:prstGeom prst="rect">
+            <a:avLst/>
+          </a:prstGeom>
+        </p:spPr>
+      </p:pic>
       <p:sp>
         <p:nvSpPr>
-          <p:cNvPr id="2" name="Title 1">
+          <p:cNvPr id="25" name="Rectangle 24">
             <a:extLst>
               <a:ext uri="{FF2B5EF4-FFF2-40B4-BE49-F238E27FC236}">
-                <a16:creationId xmlns:a16="http://schemas.microsoft.com/office/drawing/2014/main" id="{623C1A38-ED90-1B23-FDA6-07BE84AFEABA}"/>
+                <a16:creationId xmlns:a16="http://schemas.microsoft.com/office/drawing/2014/main" id="{E3B4FF89-C45F-4E24-B963-61E855708F2A}"/>
+              </a:ext>
+              <a:ext uri="{C183D7F6-B498-43B3-948B-1728B52AA6E4}">
+                <adec:decorative xmlns:adec="http://schemas.microsoft.com/office/drawing/2017/decorative" val="1"/>
               </a:ext>
             </a:extLst>
           </p:cNvPr>
           <p:cNvSpPr>
-            <a:spLocks noGrp="1"/>
+            <a:spLocks noGrp="1" noRot="1" noChangeAspect="1" noMove="1" noResize="1" noEditPoints="1" noAdjustHandles="1" noChangeArrowheads="1" noChangeShapeType="1" noTextEdit="1"/>
           </p:cNvSpPr>
           <p:nvPr>
-            <p:ph type="title"/>
+            <p:extLst>
+              <p:ext uri="{386F3935-93C4-4BCD-93E2-E3B085C9AB24}">
+                <p16:designElem xmlns:p16="http://schemas.microsoft.com/office/powerpoint/2015/main" val="1"/>
+              </p:ext>
+            </p:extLst>
           </p:nvPr>
         </p:nvSpPr>
-        <p:spPr/>
+        <p:spPr>
+          <a:xfrm>
+            <a:off x="4023671" y="0"/>
+            <a:ext cx="73152" cy="6858000"/>
+          </a:xfrm>
+          <a:prstGeom prst="rect">
+            <a:avLst/>
+          </a:prstGeom>
+          <a:solidFill>
+            <a:schemeClr val="tx1">
+              <a:lumMod val="75000"/>
+              <a:lumOff val="25000"/>
+            </a:schemeClr>
+          </a:solidFill>
+          <a:ln>
+            <a:noFill/>
+          </a:ln>
+        </p:spPr>
+        <p:style>
+          <a:lnRef idx="2">
+            <a:schemeClr val="accent1">
+              <a:shade val="50000"/>
+            </a:schemeClr>
+          </a:lnRef>
+          <a:fillRef idx="1">
+            <a:schemeClr val="accent1"/>
+          </a:fillRef>
+          <a:effectRef idx="0">
+            <a:schemeClr val="accent1"/>
+          </a:effectRef>
+          <a:fontRef idx="minor">
+            <a:schemeClr val="lt1"/>
+          </a:fontRef>
+        </p:style>
         <p:txBody>
-          <a:bodyPr/>
+          <a:bodyPr rtlCol="0" anchor="ctr"/>
           <a:lstStyle/>
           <a:p>
-            <a:r>
-              <a:rPr lang="en-US" dirty="0"/>
-              <a:t>The Draft Helper in Action</a:t>
-            </a:r>
+            <a:pPr algn="ctr"/>
+            <a:endParaRPr lang="en-US"/>
           </a:p>
         </p:txBody>
       </p:sp>
+      <p:pic>
+        <p:nvPicPr>
+          <p:cNvPr id="5" name="Content Placeholder 4">
+            <a:extLst>
+              <a:ext uri="{FF2B5EF4-FFF2-40B4-BE49-F238E27FC236}">
+                <a16:creationId xmlns:a16="http://schemas.microsoft.com/office/drawing/2014/main" id="{6C8BF779-FFE8-6180-BE3C-EDB51C529EC5}"/>
+              </a:ext>
+            </a:extLst>
+          </p:cNvPr>
+          <p:cNvPicPr>
+            <a:picLocks noGrp="1" noChangeAspect="1"/>
+          </p:cNvPicPr>
+          <p:nvPr>
+            <p:ph idx="1"/>
+          </p:nvPr>
+        </p:nvPicPr>
+        <p:blipFill>
+          <a:blip r:embed="rId3"/>
+          <a:stretch>
+            <a:fillRect/>
+          </a:stretch>
+        </p:blipFill>
+        <p:spPr>
+          <a:xfrm>
+            <a:off x="294599" y="518420"/>
+            <a:ext cx="3401568" cy="2355584"/>
+          </a:xfrm>
+          <a:prstGeom prst="rect">
+            <a:avLst/>
+          </a:prstGeom>
+        </p:spPr>
+      </p:pic>
       <p:sp>
         <p:nvSpPr>
-          <p:cNvPr id="3" name="Content Placeholder 2">
+          <p:cNvPr id="27" name="Rectangle 26">
             <a:extLst>
               <a:ext uri="{FF2B5EF4-FFF2-40B4-BE49-F238E27FC236}">
-                <a16:creationId xmlns:a16="http://schemas.microsoft.com/office/drawing/2014/main" id="{2A61E021-D379-D594-BFBC-181E7726FB1B}"/>
+                <a16:creationId xmlns:a16="http://schemas.microsoft.com/office/drawing/2014/main" id="{14F25C03-EF67-4344-8AEA-7B3FA0DED024}"/>
+              </a:ext>
+              <a:ext uri="{C183D7F6-B498-43B3-948B-1728B52AA6E4}">
+                <adec:decorative xmlns:adec="http://schemas.microsoft.com/office/drawing/2017/decorative" val="1"/>
               </a:ext>
             </a:extLst>
           </p:cNvPr>
           <p:cNvSpPr>
-            <a:spLocks noGrp="1"/>
+            <a:spLocks noGrp="1" noRot="1" noChangeAspect="1" noMove="1" noResize="1" noEditPoints="1" noAdjustHandles="1" noChangeArrowheads="1" noChangeShapeType="1" noTextEdit="1"/>
           </p:cNvSpPr>
           <p:nvPr>
-            <p:ph idx="1"/>
+            <p:extLst>
+              <p:ext uri="{386F3935-93C4-4BCD-93E2-E3B085C9AB24}">
+                <p16:designElem xmlns:p16="http://schemas.microsoft.com/office/powerpoint/2015/main" val="1"/>
+              </p:ext>
+            </p:extLst>
           </p:nvPr>
         </p:nvSpPr>
-        <p:spPr/>
+        <p:spPr>
+          <a:xfrm>
+            <a:off x="8107836" y="0"/>
+            <a:ext cx="73152" cy="6858000"/>
+          </a:xfrm>
+          <a:prstGeom prst="rect">
+            <a:avLst/>
+          </a:prstGeom>
+          <a:solidFill>
+            <a:schemeClr val="tx1">
+              <a:lumMod val="75000"/>
+              <a:lumOff val="25000"/>
+            </a:schemeClr>
+          </a:solidFill>
+          <a:ln>
+            <a:noFill/>
+          </a:ln>
+        </p:spPr>
+        <p:style>
+          <a:lnRef idx="2">
+            <a:schemeClr val="accent1">
+              <a:shade val="50000"/>
+            </a:schemeClr>
+          </a:lnRef>
+          <a:fillRef idx="1">
+            <a:schemeClr val="accent1"/>
+          </a:fillRef>
+          <a:effectRef idx="0">
+            <a:schemeClr val="accent1"/>
+          </a:effectRef>
+          <a:fontRef idx="minor">
+            <a:schemeClr val="lt1"/>
+          </a:fontRef>
+        </p:style>
         <p:txBody>
-          <a:bodyPr/>
+          <a:bodyPr rtlCol="0" anchor="ctr"/>
           <a:lstStyle/>
           <a:p>
-            <a:endParaRPr lang="en-US" dirty="0"/>
+            <a:pPr algn="ctr"/>
+            <a:endParaRPr lang="en-US"/>
           </a:p>
         </p:txBody>
       </p:sp>
+      <p:pic>
+        <p:nvPicPr>
+          <p:cNvPr id="15" name="Picture 14">
+            <a:extLst>
+              <a:ext uri="{FF2B5EF4-FFF2-40B4-BE49-F238E27FC236}">
+                <a16:creationId xmlns:a16="http://schemas.microsoft.com/office/drawing/2014/main" id="{012DF104-BAF0-614E-F08E-4C57D0CAA2F3}"/>
+              </a:ext>
+            </a:extLst>
+          </p:cNvPr>
+          <p:cNvPicPr>
+            <a:picLocks noChangeAspect="1"/>
+          </p:cNvPicPr>
+          <p:nvPr/>
+        </p:nvPicPr>
+        <p:blipFill>
+          <a:blip r:embed="rId4"/>
+          <a:stretch>
+            <a:fillRect/>
+          </a:stretch>
+        </p:blipFill>
+        <p:spPr>
+          <a:xfrm>
+            <a:off x="8484948" y="3836002"/>
+            <a:ext cx="3401568" cy="2534167"/>
+          </a:xfrm>
+          <a:prstGeom prst="rect">
+            <a:avLst/>
+          </a:prstGeom>
+        </p:spPr>
+      </p:pic>
+      <p:sp>
+        <p:nvSpPr>
+          <p:cNvPr id="29" name="Rectangle 28">
+            <a:extLst>
+              <a:ext uri="{FF2B5EF4-FFF2-40B4-BE49-F238E27FC236}">
+                <a16:creationId xmlns:a16="http://schemas.microsoft.com/office/drawing/2014/main" id="{F74793DE-3651-410B-B243-8F0B1468E6A4}"/>
+              </a:ext>
+              <a:ext uri="{C183D7F6-B498-43B3-948B-1728B52AA6E4}">
+                <adec:decorative xmlns:adec="http://schemas.microsoft.com/office/drawing/2017/decorative" val="1"/>
+              </a:ext>
+            </a:extLst>
+          </p:cNvPr>
+          <p:cNvSpPr>
+            <a:spLocks noGrp="1" noRot="1" noChangeAspect="1" noMove="1" noResize="1" noEditPoints="1" noAdjustHandles="1" noChangeArrowheads="1" noChangeShapeType="1" noTextEdit="1"/>
+          </p:cNvSpPr>
+          <p:nvPr>
+            <p:extLst>
+              <p:ext uri="{386F3935-93C4-4BCD-93E2-E3B085C9AB24}">
+                <p16:designElem xmlns:p16="http://schemas.microsoft.com/office/powerpoint/2015/main" val="1"/>
+              </p:ext>
+            </p:extLst>
+          </p:nvPr>
+        </p:nvSpPr>
+        <p:spPr>
+          <a:xfrm rot="5400000">
+            <a:off x="6059424" y="-2665476"/>
+            <a:ext cx="73152" cy="12188952"/>
+          </a:xfrm>
+          <a:prstGeom prst="rect">
+            <a:avLst/>
+          </a:prstGeom>
+          <a:solidFill>
+            <a:schemeClr val="tx1">
+              <a:lumMod val="75000"/>
+              <a:lumOff val="25000"/>
+            </a:schemeClr>
+          </a:solidFill>
+          <a:ln>
+            <a:noFill/>
+          </a:ln>
+        </p:spPr>
+        <p:style>
+          <a:lnRef idx="2">
+            <a:schemeClr val="accent1">
+              <a:shade val="50000"/>
+            </a:schemeClr>
+          </a:lnRef>
+          <a:fillRef idx="1">
+            <a:schemeClr val="accent1"/>
+          </a:fillRef>
+          <a:effectRef idx="0">
+            <a:schemeClr val="accent1"/>
+          </a:effectRef>
+          <a:fontRef idx="minor">
+            <a:schemeClr val="lt1"/>
+          </a:fontRef>
+        </p:style>
+        <p:txBody>
+          <a:bodyPr rtlCol="0" anchor="ctr"/>
+          <a:lstStyle/>
+          <a:p>
+            <a:pPr algn="ctr"/>
+            <a:endParaRPr lang="en-US"/>
+          </a:p>
+        </p:txBody>
+      </p:sp>
+      <p:pic>
+        <p:nvPicPr>
+          <p:cNvPr id="11" name="Picture 10">
+            <a:extLst>
+              <a:ext uri="{FF2B5EF4-FFF2-40B4-BE49-F238E27FC236}">
+                <a16:creationId xmlns:a16="http://schemas.microsoft.com/office/drawing/2014/main" id="{D9E8B643-29EE-B0E8-EDA9-3BC8B760FA1A}"/>
+              </a:ext>
+            </a:extLst>
+          </p:cNvPr>
+          <p:cNvPicPr>
+            <a:picLocks noChangeAspect="1"/>
+          </p:cNvPicPr>
+          <p:nvPr/>
+        </p:nvPicPr>
+        <p:blipFill>
+          <a:blip r:embed="rId5"/>
+          <a:stretch>
+            <a:fillRect/>
+          </a:stretch>
+        </p:blipFill>
+        <p:spPr>
+          <a:xfrm>
+            <a:off x="8406145" y="443578"/>
+            <a:ext cx="3401568" cy="2534167"/>
+          </a:xfrm>
+          <a:prstGeom prst="rect">
+            <a:avLst/>
+          </a:prstGeom>
+        </p:spPr>
+      </p:pic>
+      <p:pic>
+        <p:nvPicPr>
+          <p:cNvPr id="7" name="Picture 6">
+            <a:extLst>
+              <a:ext uri="{FF2B5EF4-FFF2-40B4-BE49-F238E27FC236}">
+                <a16:creationId xmlns:a16="http://schemas.microsoft.com/office/drawing/2014/main" id="{E74454B4-08D6-94FC-78BE-6158A9D10485}"/>
+              </a:ext>
+            </a:extLst>
+          </p:cNvPr>
+          <p:cNvPicPr>
+            <a:picLocks noChangeAspect="1"/>
+          </p:cNvPicPr>
+          <p:nvPr/>
+        </p:nvPicPr>
+        <p:blipFill>
+          <a:blip r:embed="rId6"/>
+          <a:stretch>
+            <a:fillRect/>
+          </a:stretch>
+        </p:blipFill>
+        <p:spPr>
+          <a:xfrm>
+            <a:off x="4395132" y="520050"/>
+            <a:ext cx="3401568" cy="2517160"/>
+          </a:xfrm>
+          <a:prstGeom prst="rect">
+            <a:avLst/>
+          </a:prstGeom>
+        </p:spPr>
+      </p:pic>
+      <p:pic>
+        <p:nvPicPr>
+          <p:cNvPr id="13" name="Picture 12">
+            <a:extLst>
+              <a:ext uri="{FF2B5EF4-FFF2-40B4-BE49-F238E27FC236}">
+                <a16:creationId xmlns:a16="http://schemas.microsoft.com/office/drawing/2014/main" id="{1AD3A1CB-F858-1CF1-0DA9-709FDF336FCF}"/>
+              </a:ext>
+            </a:extLst>
+          </p:cNvPr>
+          <p:cNvPicPr>
+            <a:picLocks noChangeAspect="1"/>
+          </p:cNvPicPr>
+          <p:nvPr/>
+        </p:nvPicPr>
+        <p:blipFill>
+          <a:blip r:embed="rId7"/>
+          <a:stretch>
+            <a:fillRect/>
+          </a:stretch>
+        </p:blipFill>
+        <p:spPr>
+          <a:xfrm>
+            <a:off x="4395132" y="3907461"/>
+            <a:ext cx="3401568" cy="2508655"/>
+          </a:xfrm>
+          <a:prstGeom prst="rect">
+            <a:avLst/>
+          </a:prstGeom>
+        </p:spPr>
+      </p:pic>
     </p:spTree>
     <p:extLst>
       <p:ext uri="{BB962C8B-B14F-4D97-AF65-F5344CB8AC3E}">
@@ -20072,12 +20407,11 @@
 </file>
 
 <file path=customXml/item1.xml><?xml version="1.0" encoding="utf-8"?>
-<?mso-contentType ?>
-<FormTemplates xmlns="http://schemas.microsoft.com/sharepoint/v3/contenttype/forms">
-  <Display>DocumentLibraryForm</Display>
-  <Edit>DocumentLibraryForm</Edit>
-  <New>DocumentLibraryForm</New>
-</FormTemplates>
+<p:properties xmlns:p="http://schemas.microsoft.com/office/2006/metadata/properties" xmlns:xsi="http://www.w3.org/2001/XMLSchema-instance" xmlns:pc="http://schemas.microsoft.com/office/infopath/2007/PartnerControls">
+  <documentManagement>
+    <_activity xmlns="8b864288-45da-4d14-96e9-1093a317b33c" xsi:nil="true"/>
+  </documentManagement>
+</p:properties>
 </file>
 
 <file path=customXml/item2.xml><?xml version="1.0" encoding="utf-8"?>
@@ -20255,17 +20589,26 @@
 </file>
 
 <file path=customXml/item3.xml><?xml version="1.0" encoding="utf-8"?>
-<p:properties xmlns:p="http://schemas.microsoft.com/office/2006/metadata/properties" xmlns:xsi="http://www.w3.org/2001/XMLSchema-instance" xmlns:pc="http://schemas.microsoft.com/office/infopath/2007/PartnerControls">
-  <documentManagement>
-    <_activity xmlns="8b864288-45da-4d14-96e9-1093a317b33c" xsi:nil="true"/>
-  </documentManagement>
-</p:properties>
+<?mso-contentType ?>
+<FormTemplates xmlns="http://schemas.microsoft.com/sharepoint/v3/contenttype/forms">
+  <Display>DocumentLibraryForm</Display>
+  <Edit>DocumentLibraryForm</Edit>
+  <New>DocumentLibraryForm</New>
+</FormTemplates>
 </file>
 
 <file path=customXml/itemProps1.xml><?xml version="1.0" encoding="utf-8"?>
-<ds:datastoreItem xmlns:ds="http://schemas.openxmlformats.org/officeDocument/2006/customXml" ds:itemID="{885AF9BA-51F1-4D9E-8650-70C2F8A17B22}">
+<ds:datastoreItem xmlns:ds="http://schemas.openxmlformats.org/officeDocument/2006/customXml" ds:itemID="{7ED903BE-8746-420D-9B32-12CD1BB36179}">
   <ds:schemaRefs>
-    <ds:schemaRef ds:uri="http://schemas.microsoft.com/sharepoint/v3/contenttype/forms"/>
+    <ds:schemaRef ds:uri="http://purl.org/dc/elements/1.1/"/>
+    <ds:schemaRef ds:uri="http://purl.org/dc/terms/"/>
+    <ds:schemaRef ds:uri="http://schemas.microsoft.com/office/2006/documentManagement/types"/>
+    <ds:schemaRef ds:uri="http://schemas.microsoft.com/office/infopath/2007/PartnerControls"/>
+    <ds:schemaRef ds:uri="http://purl.org/dc/dcmitype/"/>
+    <ds:schemaRef ds:uri="http://schemas.openxmlformats.org/package/2006/metadata/core-properties"/>
+    <ds:schemaRef ds:uri="8b864288-45da-4d14-96e9-1093a317b33c"/>
+    <ds:schemaRef ds:uri="http://schemas.microsoft.com/office/2006/metadata/properties"/>
+    <ds:schemaRef ds:uri="http://www.w3.org/XML/1998/namespace"/>
   </ds:schemaRefs>
 </ds:datastoreItem>
 </file>
@@ -20289,17 +20632,9 @@
 </file>
 
 <file path=customXml/itemProps3.xml><?xml version="1.0" encoding="utf-8"?>
-<ds:datastoreItem xmlns:ds="http://schemas.openxmlformats.org/officeDocument/2006/customXml" ds:itemID="{7ED903BE-8746-420D-9B32-12CD1BB36179}">
+<ds:datastoreItem xmlns:ds="http://schemas.openxmlformats.org/officeDocument/2006/customXml" ds:itemID="{885AF9BA-51F1-4D9E-8650-70C2F8A17B22}">
   <ds:schemaRefs>
-    <ds:schemaRef ds:uri="http://purl.org/dc/elements/1.1/"/>
-    <ds:schemaRef ds:uri="http://purl.org/dc/terms/"/>
-    <ds:schemaRef ds:uri="http://schemas.microsoft.com/office/2006/documentManagement/types"/>
-    <ds:schemaRef ds:uri="http://schemas.microsoft.com/office/infopath/2007/PartnerControls"/>
-    <ds:schemaRef ds:uri="http://purl.org/dc/dcmitype/"/>
-    <ds:schemaRef ds:uri="http://schemas.openxmlformats.org/package/2006/metadata/core-properties"/>
-    <ds:schemaRef ds:uri="8b864288-45da-4d14-96e9-1093a317b33c"/>
-    <ds:schemaRef ds:uri="http://schemas.microsoft.com/office/2006/metadata/properties"/>
-    <ds:schemaRef ds:uri="http://www.w3.org/XML/1998/namespace"/>
+    <ds:schemaRef ds:uri="http://schemas.microsoft.com/sharepoint/v3/contenttype/forms"/>
   </ds:schemaRefs>
 </ds:datastoreItem>
 </file>